--- a/宣道詩/(宣道詩163) 速發光.pptx
+++ b/宣道詩/(宣道詩163) 速發光.pptx
@@ -158,7 +158,7 @@
   </p:defaultTextStyle>
   <p:extLst>
     <p:ext uri="{EFAFB233-063F-42B5-8137-9DF3F51BA10A}">
-      <p15:sldGuideLst xmlns:p15="http://schemas.microsoft.com/office/powerpoint/2012/main" xmlns="">
+      <p15:sldGuideLst xmlns:p15="http://schemas.microsoft.com/office/powerpoint/2012/main">
         <p15:guide id="1" orient="horz" pos="2305" userDrawn="1">
           <p15:clr>
             <a:srgbClr val="A4A3A4"/>
@@ -327,6 +327,11 @@
         </p:txBody>
       </p:sp>
     </p:spTree>
+    <p:extLst>
+      <p:ext uri="{BB962C8B-B14F-4D97-AF65-F5344CB8AC3E}">
+        <p14:creationId xmlns:p14="http://schemas.microsoft.com/office/powerpoint/2010/main" val="1"/>
+      </p:ext>
+    </p:extLst>
   </p:cSld>
   <p:clrMap bg1="lt1" tx1="dk1" bg2="lt2" tx2="dk2" accent1="accent1" accent2="accent2" accent3="accent3" accent4="accent4" accent5="accent5" accent6="accent6" hlink="hlink" folHlink="folHlink"/>
 </p:handoutMaster>
@@ -476,38 +481,37 @@
           <a:p>
             <a:pPr lvl="0"/>
             <a:r>
-              <a:rPr lang="zh-TW" altLang="en-US" smtClean="0"/>
+              <a:rPr lang="zh-TW" altLang="en-US"/>
               <a:t>按一下以編輯母片文字樣式</a:t>
             </a:r>
           </a:p>
           <a:p>
             <a:pPr lvl="1"/>
             <a:r>
-              <a:rPr lang="zh-TW" altLang="en-US" smtClean="0"/>
+              <a:rPr lang="zh-TW" altLang="en-US"/>
               <a:t>第二層</a:t>
             </a:r>
           </a:p>
           <a:p>
             <a:pPr lvl="2"/>
             <a:r>
-              <a:rPr lang="zh-TW" altLang="en-US" smtClean="0"/>
+              <a:rPr lang="zh-TW" altLang="en-US"/>
               <a:t>第三層</a:t>
             </a:r>
           </a:p>
           <a:p>
             <a:pPr lvl="3"/>
             <a:r>
-              <a:rPr lang="zh-TW" altLang="en-US" smtClean="0"/>
+              <a:rPr lang="zh-TW" altLang="en-US"/>
               <a:t>第四層</a:t>
             </a:r>
           </a:p>
           <a:p>
             <a:pPr lvl="4"/>
             <a:r>
-              <a:rPr lang="zh-TW" altLang="en-US" smtClean="0"/>
+              <a:rPr lang="zh-TW" altLang="en-US"/>
               <a:t>第五層</a:t>
             </a:r>
-            <a:endParaRPr lang="zh-TW" altLang="en-US"/>
           </a:p>
         </p:txBody>
       </p:sp>
@@ -714,7 +718,7 @@
           <a:lstStyle/>
           <a:p>
             <a:r>
-              <a:rPr lang="en-US" altLang="zh-TW" smtClean="0"/>
+              <a:rPr lang="en-US" altLang="zh-TW"/>
               <a:t>Click to edit Master title style</a:t>
             </a:r>
             <a:endParaRPr lang="zh-TW" altLang="en-US"/>
@@ -833,7 +837,7 @@
           </a:lstStyle>
           <a:p>
             <a:r>
-              <a:rPr lang="en-US" altLang="zh-TW" smtClean="0"/>
+              <a:rPr lang="en-US" altLang="zh-TW"/>
               <a:t>Click to edit Master subtitle style</a:t>
             </a:r>
             <a:endParaRPr lang="zh-TW" altLang="en-US"/>
@@ -916,7 +920,7 @@
     </p:spTree>
     <p:extLst>
       <p:ext uri="{BB962C8B-B14F-4D97-AF65-F5344CB8AC3E}">
-        <p14:creationId xmlns:p14="http://schemas.microsoft.com/office/powerpoint/2010/main" xmlns="" val="227931952"/>
+        <p14:creationId xmlns:p14="http://schemas.microsoft.com/office/powerpoint/2010/main" val="227931952"/>
       </p:ext>
     </p:extLst>
   </p:cSld>
@@ -959,7 +963,7 @@
           <a:lstStyle/>
           <a:p>
             <a:r>
-              <a:rPr lang="en-US" altLang="zh-TW" smtClean="0"/>
+              <a:rPr lang="en-US" altLang="zh-TW"/>
               <a:t>Click to edit Master title style</a:t>
             </a:r>
             <a:endParaRPr lang="zh-TW" altLang="en-US"/>
@@ -983,35 +987,35 @@
           <a:p>
             <a:pPr lvl="0"/>
             <a:r>
-              <a:rPr lang="en-US" altLang="zh-TW" smtClean="0"/>
+              <a:rPr lang="en-US" altLang="zh-TW"/>
               <a:t>Edit Master text styles</a:t>
             </a:r>
           </a:p>
           <a:p>
             <a:pPr lvl="1"/>
             <a:r>
-              <a:rPr lang="en-US" altLang="zh-TW" smtClean="0"/>
+              <a:rPr lang="en-US" altLang="zh-TW"/>
               <a:t>Second level</a:t>
             </a:r>
           </a:p>
           <a:p>
             <a:pPr lvl="2"/>
             <a:r>
-              <a:rPr lang="en-US" altLang="zh-TW" smtClean="0"/>
+              <a:rPr lang="en-US" altLang="zh-TW"/>
               <a:t>Third level</a:t>
             </a:r>
           </a:p>
           <a:p>
             <a:pPr lvl="3"/>
             <a:r>
-              <a:rPr lang="en-US" altLang="zh-TW" smtClean="0"/>
+              <a:rPr lang="en-US" altLang="zh-TW"/>
               <a:t>Fourth level</a:t>
             </a:r>
           </a:p>
           <a:p>
             <a:pPr lvl="4"/>
             <a:r>
-              <a:rPr lang="en-US" altLang="zh-TW" smtClean="0"/>
+              <a:rPr lang="en-US" altLang="zh-TW"/>
               <a:t>Fifth level</a:t>
             </a:r>
             <a:endParaRPr lang="zh-TW" altLang="en-US"/>
@@ -1094,7 +1098,7 @@
     </p:spTree>
     <p:extLst>
       <p:ext uri="{BB962C8B-B14F-4D97-AF65-F5344CB8AC3E}">
-        <p14:creationId xmlns:p14="http://schemas.microsoft.com/office/powerpoint/2010/main" xmlns="" val="3047282315"/>
+        <p14:creationId xmlns:p14="http://schemas.microsoft.com/office/powerpoint/2010/main" val="3047282315"/>
       </p:ext>
     </p:extLst>
   </p:cSld>
@@ -1142,7 +1146,7 @@
           <a:lstStyle/>
           <a:p>
             <a:r>
-              <a:rPr lang="en-US" altLang="zh-TW" smtClean="0"/>
+              <a:rPr lang="en-US" altLang="zh-TW"/>
               <a:t>Click to edit Master title style</a:t>
             </a:r>
             <a:endParaRPr lang="zh-TW" altLang="en-US"/>
@@ -1171,35 +1175,35 @@
           <a:p>
             <a:pPr lvl="0"/>
             <a:r>
-              <a:rPr lang="en-US" altLang="zh-TW" smtClean="0"/>
+              <a:rPr lang="en-US" altLang="zh-TW"/>
               <a:t>Edit Master text styles</a:t>
             </a:r>
           </a:p>
           <a:p>
             <a:pPr lvl="1"/>
             <a:r>
-              <a:rPr lang="en-US" altLang="zh-TW" smtClean="0"/>
+              <a:rPr lang="en-US" altLang="zh-TW"/>
               <a:t>Second level</a:t>
             </a:r>
           </a:p>
           <a:p>
             <a:pPr lvl="2"/>
             <a:r>
-              <a:rPr lang="en-US" altLang="zh-TW" smtClean="0"/>
+              <a:rPr lang="en-US" altLang="zh-TW"/>
               <a:t>Third level</a:t>
             </a:r>
           </a:p>
           <a:p>
             <a:pPr lvl="3"/>
             <a:r>
-              <a:rPr lang="en-US" altLang="zh-TW" smtClean="0"/>
+              <a:rPr lang="en-US" altLang="zh-TW"/>
               <a:t>Fourth level</a:t>
             </a:r>
           </a:p>
           <a:p>
             <a:pPr lvl="4"/>
             <a:r>
-              <a:rPr lang="en-US" altLang="zh-TW" smtClean="0"/>
+              <a:rPr lang="en-US" altLang="zh-TW"/>
               <a:t>Fifth level</a:t>
             </a:r>
             <a:endParaRPr lang="zh-TW" altLang="en-US"/>
@@ -1282,7 +1286,7 @@
     </p:spTree>
     <p:extLst>
       <p:ext uri="{BB962C8B-B14F-4D97-AF65-F5344CB8AC3E}">
-        <p14:creationId xmlns:p14="http://schemas.microsoft.com/office/powerpoint/2010/main" xmlns="" val="897912708"/>
+        <p14:creationId xmlns:p14="http://schemas.microsoft.com/office/powerpoint/2010/main" val="897912708"/>
       </p:ext>
     </p:extLst>
   </p:cSld>
@@ -1325,7 +1329,7 @@
           <a:lstStyle/>
           <a:p>
             <a:r>
-              <a:rPr lang="en-US" altLang="zh-TW" smtClean="0"/>
+              <a:rPr lang="en-US" altLang="zh-TW"/>
               <a:t>Click to edit Master title style</a:t>
             </a:r>
             <a:endParaRPr lang="zh-TW" altLang="en-US"/>
@@ -1349,35 +1353,35 @@
           <a:p>
             <a:pPr lvl="0"/>
             <a:r>
-              <a:rPr lang="en-US" altLang="zh-TW" smtClean="0"/>
+              <a:rPr lang="en-US" altLang="zh-TW"/>
               <a:t>Edit Master text styles</a:t>
             </a:r>
           </a:p>
           <a:p>
             <a:pPr lvl="1"/>
             <a:r>
-              <a:rPr lang="en-US" altLang="zh-TW" smtClean="0"/>
+              <a:rPr lang="en-US" altLang="zh-TW"/>
               <a:t>Second level</a:t>
             </a:r>
           </a:p>
           <a:p>
             <a:pPr lvl="2"/>
             <a:r>
-              <a:rPr lang="en-US" altLang="zh-TW" smtClean="0"/>
+              <a:rPr lang="en-US" altLang="zh-TW"/>
               <a:t>Third level</a:t>
             </a:r>
           </a:p>
           <a:p>
             <a:pPr lvl="3"/>
             <a:r>
-              <a:rPr lang="en-US" altLang="zh-TW" smtClean="0"/>
+              <a:rPr lang="en-US" altLang="zh-TW"/>
               <a:t>Fourth level</a:t>
             </a:r>
           </a:p>
           <a:p>
             <a:pPr lvl="4"/>
             <a:r>
-              <a:rPr lang="en-US" altLang="zh-TW" smtClean="0"/>
+              <a:rPr lang="en-US" altLang="zh-TW"/>
               <a:t>Fifth level</a:t>
             </a:r>
             <a:endParaRPr lang="zh-TW" altLang="en-US"/>
@@ -1460,7 +1464,7 @@
     </p:spTree>
     <p:extLst>
       <p:ext uri="{BB962C8B-B14F-4D97-AF65-F5344CB8AC3E}">
-        <p14:creationId xmlns:p14="http://schemas.microsoft.com/office/powerpoint/2010/main" xmlns="" val="1680958125"/>
+        <p14:creationId xmlns:p14="http://schemas.microsoft.com/office/powerpoint/2010/main" val="1680958125"/>
       </p:ext>
     </p:extLst>
   </p:cSld>
@@ -1512,7 +1516,7 @@
           </a:lstStyle>
           <a:p>
             <a:r>
-              <a:rPr lang="en-US" altLang="zh-TW" smtClean="0"/>
+              <a:rPr lang="en-US" altLang="zh-TW"/>
               <a:t>Click to edit Master title style</a:t>
             </a:r>
             <a:endParaRPr lang="zh-TW" altLang="en-US"/>
@@ -1632,7 +1636,7 @@
           <a:p>
             <a:pPr lvl="0"/>
             <a:r>
-              <a:rPr lang="en-US" altLang="zh-TW" smtClean="0"/>
+              <a:rPr lang="en-US" altLang="zh-TW"/>
               <a:t>Edit Master text styles</a:t>
             </a:r>
           </a:p>
@@ -1714,7 +1718,7 @@
     </p:spTree>
     <p:extLst>
       <p:ext uri="{BB962C8B-B14F-4D97-AF65-F5344CB8AC3E}">
-        <p14:creationId xmlns:p14="http://schemas.microsoft.com/office/powerpoint/2010/main" xmlns="" val="65851459"/>
+        <p14:creationId xmlns:p14="http://schemas.microsoft.com/office/powerpoint/2010/main" val="65851459"/>
       </p:ext>
     </p:extLst>
   </p:cSld>
@@ -1757,7 +1761,7 @@
           <a:lstStyle/>
           <a:p>
             <a:r>
-              <a:rPr lang="en-US" altLang="zh-TW" smtClean="0"/>
+              <a:rPr lang="en-US" altLang="zh-TW"/>
               <a:t>Click to edit Master title style</a:t>
             </a:r>
             <a:endParaRPr lang="zh-TW" altLang="en-US"/>
@@ -1814,35 +1818,35 @@
           <a:p>
             <a:pPr lvl="0"/>
             <a:r>
-              <a:rPr lang="en-US" altLang="zh-TW" smtClean="0"/>
+              <a:rPr lang="en-US" altLang="zh-TW"/>
               <a:t>Edit Master text styles</a:t>
             </a:r>
           </a:p>
           <a:p>
             <a:pPr lvl="1"/>
             <a:r>
-              <a:rPr lang="en-US" altLang="zh-TW" smtClean="0"/>
+              <a:rPr lang="en-US" altLang="zh-TW"/>
               <a:t>Second level</a:t>
             </a:r>
           </a:p>
           <a:p>
             <a:pPr lvl="2"/>
             <a:r>
-              <a:rPr lang="en-US" altLang="zh-TW" smtClean="0"/>
+              <a:rPr lang="en-US" altLang="zh-TW"/>
               <a:t>Third level</a:t>
             </a:r>
           </a:p>
           <a:p>
             <a:pPr lvl="3"/>
             <a:r>
-              <a:rPr lang="en-US" altLang="zh-TW" smtClean="0"/>
+              <a:rPr lang="en-US" altLang="zh-TW"/>
               <a:t>Fourth level</a:t>
             </a:r>
           </a:p>
           <a:p>
             <a:pPr lvl="4"/>
             <a:r>
-              <a:rPr lang="en-US" altLang="zh-TW" smtClean="0"/>
+              <a:rPr lang="en-US" altLang="zh-TW"/>
               <a:t>Fifth level</a:t>
             </a:r>
             <a:endParaRPr lang="zh-TW" altLang="en-US"/>
@@ -1899,35 +1903,35 @@
           <a:p>
             <a:pPr lvl="0"/>
             <a:r>
-              <a:rPr lang="en-US" altLang="zh-TW" smtClean="0"/>
+              <a:rPr lang="en-US" altLang="zh-TW"/>
               <a:t>Edit Master text styles</a:t>
             </a:r>
           </a:p>
           <a:p>
             <a:pPr lvl="1"/>
             <a:r>
-              <a:rPr lang="en-US" altLang="zh-TW" smtClean="0"/>
+              <a:rPr lang="en-US" altLang="zh-TW"/>
               <a:t>Second level</a:t>
             </a:r>
           </a:p>
           <a:p>
             <a:pPr lvl="2"/>
             <a:r>
-              <a:rPr lang="en-US" altLang="zh-TW" smtClean="0"/>
+              <a:rPr lang="en-US" altLang="zh-TW"/>
               <a:t>Third level</a:t>
             </a:r>
           </a:p>
           <a:p>
             <a:pPr lvl="3"/>
             <a:r>
-              <a:rPr lang="en-US" altLang="zh-TW" smtClean="0"/>
+              <a:rPr lang="en-US" altLang="zh-TW"/>
               <a:t>Fourth level</a:t>
             </a:r>
           </a:p>
           <a:p>
             <a:pPr lvl="4"/>
             <a:r>
-              <a:rPr lang="en-US" altLang="zh-TW" smtClean="0"/>
+              <a:rPr lang="en-US" altLang="zh-TW"/>
               <a:t>Fifth level</a:t>
             </a:r>
             <a:endParaRPr lang="zh-TW" altLang="en-US"/>
@@ -2010,7 +2014,7 @@
     </p:spTree>
     <p:extLst>
       <p:ext uri="{BB962C8B-B14F-4D97-AF65-F5344CB8AC3E}">
-        <p14:creationId xmlns:p14="http://schemas.microsoft.com/office/powerpoint/2010/main" xmlns="" val="1249376933"/>
+        <p14:creationId xmlns:p14="http://schemas.microsoft.com/office/powerpoint/2010/main" val="1249376933"/>
       </p:ext>
     </p:extLst>
   </p:cSld>
@@ -2057,7 +2061,7 @@
           </a:lstStyle>
           <a:p>
             <a:r>
-              <a:rPr lang="en-US" altLang="zh-TW" smtClean="0"/>
+              <a:rPr lang="en-US" altLang="zh-TW"/>
               <a:t>Click to edit Master title style</a:t>
             </a:r>
             <a:endParaRPr lang="zh-TW" altLang="en-US"/>
@@ -2123,7 +2127,7 @@
           <a:p>
             <a:pPr lvl="0"/>
             <a:r>
-              <a:rPr lang="en-US" altLang="zh-TW" smtClean="0"/>
+              <a:rPr lang="en-US" altLang="zh-TW"/>
               <a:t>Edit Master text styles</a:t>
             </a:r>
           </a:p>
@@ -2179,35 +2183,35 @@
           <a:p>
             <a:pPr lvl="0"/>
             <a:r>
-              <a:rPr lang="en-US" altLang="zh-TW" smtClean="0"/>
+              <a:rPr lang="en-US" altLang="zh-TW"/>
               <a:t>Edit Master text styles</a:t>
             </a:r>
           </a:p>
           <a:p>
             <a:pPr lvl="1"/>
             <a:r>
-              <a:rPr lang="en-US" altLang="zh-TW" smtClean="0"/>
+              <a:rPr lang="en-US" altLang="zh-TW"/>
               <a:t>Second level</a:t>
             </a:r>
           </a:p>
           <a:p>
             <a:pPr lvl="2"/>
             <a:r>
-              <a:rPr lang="en-US" altLang="zh-TW" smtClean="0"/>
+              <a:rPr lang="en-US" altLang="zh-TW"/>
               <a:t>Third level</a:t>
             </a:r>
           </a:p>
           <a:p>
             <a:pPr lvl="3"/>
             <a:r>
-              <a:rPr lang="en-US" altLang="zh-TW" smtClean="0"/>
+              <a:rPr lang="en-US" altLang="zh-TW"/>
               <a:t>Fourth level</a:t>
             </a:r>
           </a:p>
           <a:p>
             <a:pPr lvl="4"/>
             <a:r>
-              <a:rPr lang="en-US" altLang="zh-TW" smtClean="0"/>
+              <a:rPr lang="en-US" altLang="zh-TW"/>
               <a:t>Fifth level</a:t>
             </a:r>
             <a:endParaRPr lang="zh-TW" altLang="en-US"/>
@@ -2273,7 +2277,7 @@
           <a:p>
             <a:pPr lvl="0"/>
             <a:r>
-              <a:rPr lang="en-US" altLang="zh-TW" smtClean="0"/>
+              <a:rPr lang="en-US" altLang="zh-TW"/>
               <a:t>Edit Master text styles</a:t>
             </a:r>
           </a:p>
@@ -2329,35 +2333,35 @@
           <a:p>
             <a:pPr lvl="0"/>
             <a:r>
-              <a:rPr lang="en-US" altLang="zh-TW" smtClean="0"/>
+              <a:rPr lang="en-US" altLang="zh-TW"/>
               <a:t>Edit Master text styles</a:t>
             </a:r>
           </a:p>
           <a:p>
             <a:pPr lvl="1"/>
             <a:r>
-              <a:rPr lang="en-US" altLang="zh-TW" smtClean="0"/>
+              <a:rPr lang="en-US" altLang="zh-TW"/>
               <a:t>Second level</a:t>
             </a:r>
           </a:p>
           <a:p>
             <a:pPr lvl="2"/>
             <a:r>
-              <a:rPr lang="en-US" altLang="zh-TW" smtClean="0"/>
+              <a:rPr lang="en-US" altLang="zh-TW"/>
               <a:t>Third level</a:t>
             </a:r>
           </a:p>
           <a:p>
             <a:pPr lvl="3"/>
             <a:r>
-              <a:rPr lang="en-US" altLang="zh-TW" smtClean="0"/>
+              <a:rPr lang="en-US" altLang="zh-TW"/>
               <a:t>Fourth level</a:t>
             </a:r>
           </a:p>
           <a:p>
             <a:pPr lvl="4"/>
             <a:r>
-              <a:rPr lang="en-US" altLang="zh-TW" smtClean="0"/>
+              <a:rPr lang="en-US" altLang="zh-TW"/>
               <a:t>Fifth level</a:t>
             </a:r>
             <a:endParaRPr lang="zh-TW" altLang="en-US"/>
@@ -2440,7 +2444,7 @@
     </p:spTree>
     <p:extLst>
       <p:ext uri="{BB962C8B-B14F-4D97-AF65-F5344CB8AC3E}">
-        <p14:creationId xmlns:p14="http://schemas.microsoft.com/office/powerpoint/2010/main" xmlns="" val="2070853086"/>
+        <p14:creationId xmlns:p14="http://schemas.microsoft.com/office/powerpoint/2010/main" val="2070853086"/>
       </p:ext>
     </p:extLst>
   </p:cSld>
@@ -2483,7 +2487,7 @@
           <a:lstStyle/>
           <a:p>
             <a:r>
-              <a:rPr lang="en-US" altLang="zh-TW" smtClean="0"/>
+              <a:rPr lang="en-US" altLang="zh-TW"/>
               <a:t>Click to edit Master title style</a:t>
             </a:r>
             <a:endParaRPr lang="zh-TW" altLang="en-US"/>
@@ -2566,7 +2570,7 @@
     </p:spTree>
     <p:extLst>
       <p:ext uri="{BB962C8B-B14F-4D97-AF65-F5344CB8AC3E}">
-        <p14:creationId xmlns:p14="http://schemas.microsoft.com/office/powerpoint/2010/main" xmlns="" val="2718228996"/>
+        <p14:creationId xmlns:p14="http://schemas.microsoft.com/office/powerpoint/2010/main" val="2718228996"/>
       </p:ext>
     </p:extLst>
   </p:cSld>
@@ -2669,7 +2673,7 @@
     </p:spTree>
     <p:extLst>
       <p:ext uri="{BB962C8B-B14F-4D97-AF65-F5344CB8AC3E}">
-        <p14:creationId xmlns:p14="http://schemas.microsoft.com/office/powerpoint/2010/main" xmlns="" val="2270708949"/>
+        <p14:creationId xmlns:p14="http://schemas.microsoft.com/office/powerpoint/2010/main" val="2270708949"/>
       </p:ext>
     </p:extLst>
   </p:cSld>
@@ -2721,7 +2725,7 @@
           </a:lstStyle>
           <a:p>
             <a:r>
-              <a:rPr lang="en-US" altLang="zh-TW" smtClean="0"/>
+              <a:rPr lang="en-US" altLang="zh-TW"/>
               <a:t>Click to edit Master title style</a:t>
             </a:r>
             <a:endParaRPr lang="zh-TW" altLang="en-US"/>
@@ -2778,35 +2782,35 @@
           <a:p>
             <a:pPr lvl="0"/>
             <a:r>
-              <a:rPr lang="en-US" altLang="zh-TW" smtClean="0"/>
+              <a:rPr lang="en-US" altLang="zh-TW"/>
               <a:t>Edit Master text styles</a:t>
             </a:r>
           </a:p>
           <a:p>
             <a:pPr lvl="1"/>
             <a:r>
-              <a:rPr lang="en-US" altLang="zh-TW" smtClean="0"/>
+              <a:rPr lang="en-US" altLang="zh-TW"/>
               <a:t>Second level</a:t>
             </a:r>
           </a:p>
           <a:p>
             <a:pPr lvl="2"/>
             <a:r>
-              <a:rPr lang="en-US" altLang="zh-TW" smtClean="0"/>
+              <a:rPr lang="en-US" altLang="zh-TW"/>
               <a:t>Third level</a:t>
             </a:r>
           </a:p>
           <a:p>
             <a:pPr lvl="3"/>
             <a:r>
-              <a:rPr lang="en-US" altLang="zh-TW" smtClean="0"/>
+              <a:rPr lang="en-US" altLang="zh-TW"/>
               <a:t>Fourth level</a:t>
             </a:r>
           </a:p>
           <a:p>
             <a:pPr lvl="4"/>
             <a:r>
-              <a:rPr lang="en-US" altLang="zh-TW" smtClean="0"/>
+              <a:rPr lang="en-US" altLang="zh-TW"/>
               <a:t>Fifth level</a:t>
             </a:r>
             <a:endParaRPr lang="zh-TW" altLang="en-US"/>
@@ -2872,7 +2876,7 @@
           <a:p>
             <a:pPr lvl="0"/>
             <a:r>
-              <a:rPr lang="en-US" altLang="zh-TW" smtClean="0"/>
+              <a:rPr lang="en-US" altLang="zh-TW"/>
               <a:t>Edit Master text styles</a:t>
             </a:r>
           </a:p>
@@ -2954,7 +2958,7 @@
     </p:spTree>
     <p:extLst>
       <p:ext uri="{BB962C8B-B14F-4D97-AF65-F5344CB8AC3E}">
-        <p14:creationId xmlns:p14="http://schemas.microsoft.com/office/powerpoint/2010/main" xmlns="" val="2138122019"/>
+        <p14:creationId xmlns:p14="http://schemas.microsoft.com/office/powerpoint/2010/main" val="2138122019"/>
       </p:ext>
     </p:extLst>
   </p:cSld>
@@ -3006,7 +3010,7 @@
           </a:lstStyle>
           <a:p>
             <a:r>
-              <a:rPr lang="en-US" altLang="zh-TW" smtClean="0"/>
+              <a:rPr lang="en-US" altLang="zh-TW"/>
               <a:t>Click to edit Master title style</a:t>
             </a:r>
             <a:endParaRPr lang="zh-TW" altLang="en-US"/>
@@ -3071,7 +3075,7 @@
           </a:lstStyle>
           <a:p>
             <a:r>
-              <a:rPr lang="en-US" altLang="zh-TW" smtClean="0"/>
+              <a:rPr lang="en-US" altLang="zh-TW"/>
               <a:t>Click icon to add picture</a:t>
             </a:r>
             <a:endParaRPr lang="zh-TW" altLang="en-US"/>
@@ -3137,7 +3141,7 @@
           <a:p>
             <a:pPr lvl="0"/>
             <a:r>
-              <a:rPr lang="en-US" altLang="zh-TW" smtClean="0"/>
+              <a:rPr lang="en-US" altLang="zh-TW"/>
               <a:t>Edit Master text styles</a:t>
             </a:r>
           </a:p>
@@ -3219,7 +3223,7 @@
     </p:spTree>
     <p:extLst>
       <p:ext uri="{BB962C8B-B14F-4D97-AF65-F5344CB8AC3E}">
-        <p14:creationId xmlns:p14="http://schemas.microsoft.com/office/powerpoint/2010/main" xmlns="" val="3477728911"/>
+        <p14:creationId xmlns:p14="http://schemas.microsoft.com/office/powerpoint/2010/main" val="3477728911"/>
       </p:ext>
     </p:extLst>
   </p:cSld>
@@ -3282,10 +3286,9 @@
           <a:lstStyle/>
           <a:p>
             <a:r>
-              <a:rPr lang="zh-TW" altLang="en-US" smtClean="0"/>
+              <a:rPr lang="zh-TW" altLang="en-US"/>
               <a:t>按一下以編輯母片標題樣式</a:t>
             </a:r>
-            <a:endParaRPr lang="zh-TW" altLang="en-US"/>
           </a:p>
         </p:txBody>
       </p:sp>
@@ -3316,38 +3319,37 @@
           <a:p>
             <a:pPr lvl="0"/>
             <a:r>
-              <a:rPr lang="zh-TW" altLang="en-US" smtClean="0"/>
+              <a:rPr lang="zh-TW" altLang="en-US"/>
               <a:t>按一下以編輯母片文字樣式</a:t>
             </a:r>
           </a:p>
           <a:p>
             <a:pPr lvl="1"/>
             <a:r>
-              <a:rPr lang="zh-TW" altLang="en-US" smtClean="0"/>
+              <a:rPr lang="zh-TW" altLang="en-US"/>
               <a:t>第二層</a:t>
             </a:r>
           </a:p>
           <a:p>
             <a:pPr lvl="2"/>
             <a:r>
-              <a:rPr lang="zh-TW" altLang="en-US" smtClean="0"/>
+              <a:rPr lang="zh-TW" altLang="en-US"/>
               <a:t>第三層</a:t>
             </a:r>
           </a:p>
           <a:p>
             <a:pPr lvl="3"/>
             <a:r>
-              <a:rPr lang="zh-TW" altLang="en-US" smtClean="0"/>
+              <a:rPr lang="zh-TW" altLang="en-US"/>
               <a:t>第四層</a:t>
             </a:r>
           </a:p>
           <a:p>
             <a:pPr lvl="4"/>
             <a:r>
-              <a:rPr lang="zh-TW" altLang="en-US" smtClean="0"/>
+              <a:rPr lang="zh-TW" altLang="en-US"/>
               <a:t>第五層</a:t>
             </a:r>
-            <a:endParaRPr lang="zh-TW" altLang="en-US"/>
           </a:p>
         </p:txBody>
       </p:sp>
@@ -3481,7 +3483,7 @@
     </p:spTree>
     <p:extLst>
       <p:ext uri="{BB962C8B-B14F-4D97-AF65-F5344CB8AC3E}">
-        <p14:creationId xmlns:p14="http://schemas.microsoft.com/office/powerpoint/2010/main" xmlns="" val="3985430795"/>
+        <p14:creationId xmlns:p14="http://schemas.microsoft.com/office/powerpoint/2010/main" val="3985430795"/>
       </p:ext>
     </p:extLst>
   </p:cSld>
@@ -3792,7 +3794,7 @@
           <a:lstStyle/>
           <a:p>
             <a:r>
-              <a:rPr lang="zh-CN" altLang="en-US" sz="5300" b="1" u="sng" dirty="0" smtClean="0">
+              <a:rPr lang="zh-CN" altLang="en-US" sz="5300" b="1" u="sng" dirty="0">
                 <a:solidFill>
                   <a:srgbClr val="000066"/>
                 </a:solidFill>
@@ -3809,7 +3811,7 @@
               <a:t>宣道詩 </a:t>
             </a:r>
             <a:r>
-              <a:rPr lang="en-US" altLang="zh-CN" sz="5300" b="1" u="sng" dirty="0" smtClean="0">
+              <a:rPr lang="en-US" altLang="zh-CN" sz="5300" b="1" u="sng" dirty="0">
                 <a:solidFill>
                   <a:srgbClr val="000066"/>
                 </a:solidFill>
@@ -3825,25 +3827,8 @@
               </a:rPr>
               <a:t>163</a:t>
             </a:r>
-            <a:r>
-              <a:rPr lang="en-US" altLang="zh-CN" sz="7200" b="1" i="1" dirty="0" smtClean="0">
-                <a:solidFill>
-                  <a:srgbClr val="660033"/>
-                </a:solidFill>
-                <a:effectLst>
-                  <a:outerShdw blurRad="38100" dist="38100" dir="2700000" algn="tl">
-                    <a:srgbClr val="000000">
-                      <a:alpha val="43137"/>
-                    </a:srgbClr>
-                  </a:outerShdw>
-                </a:effectLst>
-                <a:latin typeface="微軟正黑體" pitchFamily="34" charset="-120"/>
-                <a:ea typeface="微軟正黑體" pitchFamily="34" charset="-120"/>
-              </a:rPr>
-              <a:t/>
-            </a:r>
             <a:br>
-              <a:rPr lang="en-US" altLang="zh-CN" sz="7200" b="1" i="1" dirty="0" smtClean="0">
+              <a:rPr lang="en-US" altLang="zh-CN" sz="7200" b="1" i="1" dirty="0">
                 <a:solidFill>
                   <a:srgbClr val="660033"/>
                 </a:solidFill>
@@ -3859,7 +3844,7 @@
               </a:rPr>
             </a:br>
             <a:r>
-              <a:rPr lang="zh-CN" altLang="en-US" sz="8000" b="1" dirty="0" smtClean="0">
+              <a:rPr lang="zh-CN" altLang="en-US" sz="8000" b="1" dirty="0">
                 <a:solidFill>
                   <a:srgbClr val="660033"/>
                 </a:solidFill>
@@ -3895,20 +3880,13 @@
     </p:spTree>
     <p:extLst>
       <p:ext uri="{BB962C8B-B14F-4D97-AF65-F5344CB8AC3E}">
-        <p14:creationId xmlns:p14="http://schemas.microsoft.com/office/powerpoint/2010/main" xmlns="" val="3724263107"/>
+        <p14:creationId xmlns:p14="http://schemas.microsoft.com/office/powerpoint/2010/main" val="3724263107"/>
       </p:ext>
     </p:extLst>
   </p:cSld>
   <p:clrMapOvr>
     <a:masterClrMapping/>
   </p:clrMapOvr>
-  <p:timing>
-    <p:tnLst>
-      <p:par>
-        <p:cTn id="1" dur="indefinite" restart="never" nodeType="tmRoot"/>
-      </p:par>
-    </p:tnLst>
-  </p:timing>
 </p:sld>
 </file>
 
@@ -3955,7 +3933,7 @@
               <a:buNone/>
             </a:pPr>
             <a:r>
-              <a:rPr lang="zh-TW" altLang="en-US" sz="6400" b="1" dirty="0" smtClean="0">
+              <a:rPr lang="zh-TW" altLang="en-US" sz="6400" b="1" dirty="0">
                 <a:solidFill>
                   <a:srgbClr val="660033"/>
                 </a:solidFill>
@@ -3970,7 +3948,7 @@
               <a:buNone/>
             </a:pPr>
             <a:r>
-              <a:rPr lang="zh-TW" altLang="en-US" sz="6400" b="1" dirty="0" smtClean="0">
+              <a:rPr lang="zh-TW" altLang="en-US" sz="6400" b="1" dirty="0">
                 <a:solidFill>
                   <a:srgbClr val="660033"/>
                 </a:solidFill>
@@ -3998,7 +3976,7 @@
         <p:spPr>
           <a:xfrm>
             <a:off x="0" y="5238763"/>
-            <a:ext cx="12192000" cy="861775"/>
+            <a:ext cx="12192000" cy="738660"/>
           </a:xfrm>
           <a:prstGeom prst="rect">
             <a:avLst/>
@@ -4013,17 +3991,19 @@
           <a:p>
             <a:pPr algn="ctr"/>
             <a:r>
-              <a:rPr lang="en-US" sz="4800" b="1" dirty="0" smtClean="0">
+              <a:rPr lang="en-US" sz="4000" b="1" dirty="0">
                 <a:solidFill>
                   <a:srgbClr val="660033"/>
                 </a:solidFill>
+                <a:latin typeface="+mn-lt"/>
               </a:rPr>
-              <a:t>( 3 )</a:t>
-            </a:r>
-            <a:endParaRPr lang="vi-VN" sz="4800" b="1" dirty="0">
+              <a:t>( 3 / 4 )</a:t>
+            </a:r>
+            <a:endParaRPr lang="vi-VN" sz="4000" b="1" dirty="0">
               <a:solidFill>
                 <a:srgbClr val="660033"/>
               </a:solidFill>
+              <a:latin typeface="+mn-lt"/>
             </a:endParaRPr>
           </a:p>
         </p:txBody>
@@ -4031,20 +4011,13 @@
     </p:spTree>
     <p:extLst>
       <p:ext uri="{BB962C8B-B14F-4D97-AF65-F5344CB8AC3E}">
-        <p14:creationId xmlns:p14="http://schemas.microsoft.com/office/powerpoint/2010/main" xmlns="" val="399046055"/>
+        <p14:creationId xmlns:p14="http://schemas.microsoft.com/office/powerpoint/2010/main" val="399046055"/>
       </p:ext>
     </p:extLst>
   </p:cSld>
   <p:clrMapOvr>
     <a:masterClrMapping/>
   </p:clrMapOvr>
-  <p:timing>
-    <p:tnLst>
-      <p:par>
-        <p:cTn id="1" dur="indefinite" restart="never" nodeType="tmRoot"/>
-      </p:par>
-    </p:tnLst>
-  </p:timing>
 </p:sld>
 </file>
 
@@ -4091,7 +4064,7 @@
               <a:buNone/>
             </a:pPr>
             <a:r>
-              <a:rPr lang="zh-TW" altLang="en-US" sz="6400" b="1" dirty="0" smtClean="0">
+              <a:rPr lang="zh-TW" altLang="en-US" sz="6400" b="1" dirty="0">
                 <a:solidFill>
                   <a:srgbClr val="660033"/>
                 </a:solidFill>
@@ -4107,7 +4080,7 @@
               <a:buNone/>
             </a:pPr>
             <a:r>
-              <a:rPr lang="zh-TW" altLang="en-US" sz="6400" b="1" dirty="0" smtClean="0">
+              <a:rPr lang="zh-TW" altLang="en-US" sz="6400" b="1" dirty="0">
                 <a:solidFill>
                   <a:srgbClr val="660033"/>
                 </a:solidFill>
@@ -4117,14 +4090,6 @@
               </a:rPr>
               <a:t>速發光  須速發光</a:t>
             </a:r>
-            <a:endParaRPr lang="zh-TW" altLang="en-US" sz="6400" b="1" dirty="0">
-              <a:solidFill>
-                <a:srgbClr val="660033"/>
-              </a:solidFill>
-              <a:latin typeface="Microsoft JhengHei" panose="020B0604030504040204" pitchFamily="34" charset="-120"/>
-              <a:ea typeface="Microsoft JhengHei" panose="020B0604030504040204" pitchFamily="34" charset="-120"/>
-              <a:sym typeface="+mn-ea"/>
-            </a:endParaRPr>
           </a:p>
         </p:txBody>
       </p:sp>
@@ -4137,7 +4102,7 @@
         <p:spPr>
           <a:xfrm>
             <a:off x="0" y="5238763"/>
-            <a:ext cx="12192000" cy="861775"/>
+            <a:ext cx="12192000" cy="738660"/>
           </a:xfrm>
           <a:prstGeom prst="rect">
             <a:avLst/>
@@ -4152,17 +4117,19 @@
           <a:p>
             <a:pPr algn="ctr"/>
             <a:r>
-              <a:rPr lang="en-US" sz="4800" b="1" dirty="0" smtClean="0">
+              <a:rPr lang="en-US" sz="4000" b="1" dirty="0">
                 <a:solidFill>
                   <a:srgbClr val="660033"/>
                 </a:solidFill>
+                <a:latin typeface="+mn-lt"/>
               </a:rPr>
-              <a:t>( 3 )</a:t>
-            </a:r>
-            <a:endParaRPr lang="vi-VN" sz="4800" b="1" dirty="0">
+              <a:t>( 3 / 4 )</a:t>
+            </a:r>
+            <a:endParaRPr lang="vi-VN" sz="4000" b="1" dirty="0">
               <a:solidFill>
                 <a:srgbClr val="660033"/>
               </a:solidFill>
+              <a:latin typeface="+mn-lt"/>
             </a:endParaRPr>
           </a:p>
         </p:txBody>
@@ -4170,20 +4137,13 @@
     </p:spTree>
     <p:extLst>
       <p:ext uri="{BB962C8B-B14F-4D97-AF65-F5344CB8AC3E}">
-        <p14:creationId xmlns:p14="http://schemas.microsoft.com/office/powerpoint/2010/main" xmlns="" val="399046055"/>
+        <p14:creationId xmlns:p14="http://schemas.microsoft.com/office/powerpoint/2010/main" val="399046055"/>
       </p:ext>
     </p:extLst>
   </p:cSld>
   <p:clrMapOvr>
     <a:masterClrMapping/>
   </p:clrMapOvr>
-  <p:timing>
-    <p:tnLst>
-      <p:par>
-        <p:cTn id="1" dur="indefinite" restart="never" nodeType="tmRoot"/>
-      </p:par>
-    </p:tnLst>
-  </p:timing>
 </p:sld>
 </file>
 
@@ -4230,7 +4190,7 @@
               <a:buNone/>
             </a:pPr>
             <a:r>
-              <a:rPr lang="zh-TW" altLang="en-US" sz="6400" b="1" dirty="0" smtClean="0">
+              <a:rPr lang="zh-TW" altLang="en-US" sz="6400" b="1" dirty="0">
                 <a:solidFill>
                   <a:srgbClr val="660033"/>
                 </a:solidFill>
@@ -4246,7 +4206,7 @@
               <a:buNone/>
             </a:pPr>
             <a:r>
-              <a:rPr lang="zh-TW" altLang="en-US" sz="6400" b="1" dirty="0" smtClean="0">
+              <a:rPr lang="zh-TW" altLang="en-US" sz="6400" b="1" dirty="0">
                 <a:solidFill>
                   <a:srgbClr val="660033"/>
                 </a:solidFill>
@@ -4257,7 +4217,7 @@
               <a:t>速</a:t>
             </a:r>
             <a:r>
-              <a:rPr lang="zh-CN" altLang="en-US" sz="6400" b="1" dirty="0" smtClean="0">
+              <a:rPr lang="zh-CN" altLang="en-US" sz="6400" b="1" dirty="0">
                 <a:solidFill>
                   <a:srgbClr val="660033"/>
                 </a:solidFill>
@@ -4268,7 +4228,7 @@
               <a:t>照</a:t>
             </a:r>
             <a:r>
-              <a:rPr lang="zh-TW" altLang="en-US" sz="6400" b="1" dirty="0" smtClean="0">
+              <a:rPr lang="zh-TW" altLang="en-US" sz="6400" b="1" dirty="0">
                 <a:solidFill>
                   <a:srgbClr val="660033"/>
                 </a:solidFill>
@@ -4284,20 +4244,13 @@
     </p:spTree>
     <p:extLst>
       <p:ext uri="{BB962C8B-B14F-4D97-AF65-F5344CB8AC3E}">
-        <p14:creationId xmlns:p14="http://schemas.microsoft.com/office/powerpoint/2010/main" xmlns="" val="399046055"/>
+        <p14:creationId xmlns:p14="http://schemas.microsoft.com/office/powerpoint/2010/main" val="399046055"/>
       </p:ext>
     </p:extLst>
   </p:cSld>
   <p:clrMapOvr>
     <a:masterClrMapping/>
   </p:clrMapOvr>
-  <p:timing>
-    <p:tnLst>
-      <p:par>
-        <p:cTn id="1" dur="indefinite" restart="never" nodeType="tmRoot"/>
-      </p:par>
-    </p:tnLst>
-  </p:timing>
 </p:sld>
 </file>
 
@@ -4344,7 +4297,7 @@
               <a:buNone/>
             </a:pPr>
             <a:r>
-              <a:rPr lang="zh-TW" altLang="en-US" sz="6400" b="1" dirty="0" smtClean="0">
+              <a:rPr lang="zh-TW" altLang="en-US" sz="6400" b="1" dirty="0">
                 <a:solidFill>
                   <a:srgbClr val="660033"/>
                 </a:solidFill>
@@ -4360,7 +4313,7 @@
               <a:buNone/>
             </a:pPr>
             <a:r>
-              <a:rPr lang="zh-TW" altLang="en-US" sz="6400" b="1" dirty="0" smtClean="0">
+              <a:rPr lang="zh-TW" altLang="en-US" sz="6400" b="1" dirty="0">
                 <a:solidFill>
                   <a:srgbClr val="660033"/>
                 </a:solidFill>
@@ -4376,20 +4329,13 @@
     </p:spTree>
     <p:extLst>
       <p:ext uri="{BB962C8B-B14F-4D97-AF65-F5344CB8AC3E}">
-        <p14:creationId xmlns:p14="http://schemas.microsoft.com/office/powerpoint/2010/main" xmlns="" val="399046055"/>
+        <p14:creationId xmlns:p14="http://schemas.microsoft.com/office/powerpoint/2010/main" val="399046055"/>
       </p:ext>
     </p:extLst>
   </p:cSld>
   <p:clrMapOvr>
     <a:masterClrMapping/>
   </p:clrMapOvr>
-  <p:timing>
-    <p:tnLst>
-      <p:par>
-        <p:cTn id="1" dur="indefinite" restart="never" nodeType="tmRoot"/>
-      </p:par>
-    </p:tnLst>
-  </p:timing>
 </p:sld>
 </file>
 
@@ -4436,7 +4382,7 @@
               <a:buNone/>
             </a:pPr>
             <a:r>
-              <a:rPr lang="zh-TW" altLang="en-US" sz="6400" b="1" dirty="0" smtClean="0">
+              <a:rPr lang="zh-TW" altLang="en-US" sz="6400" b="1" dirty="0">
                 <a:solidFill>
                   <a:srgbClr val="660033"/>
                 </a:solidFill>
@@ -4451,7 +4397,7 @@
               <a:buNone/>
             </a:pPr>
             <a:r>
-              <a:rPr lang="zh-TW" altLang="en-US" sz="6400" b="1" dirty="0" smtClean="0">
+              <a:rPr lang="zh-TW" altLang="en-US" sz="6400" b="1" dirty="0">
                 <a:solidFill>
                   <a:srgbClr val="660033"/>
                 </a:solidFill>
@@ -4479,7 +4425,7 @@
         <p:spPr>
           <a:xfrm>
             <a:off x="0" y="5238763"/>
-            <a:ext cx="12192000" cy="861775"/>
+            <a:ext cx="12192000" cy="738660"/>
           </a:xfrm>
           <a:prstGeom prst="rect">
             <a:avLst/>
@@ -4494,17 +4440,19 @@
           <a:p>
             <a:pPr algn="ctr"/>
             <a:r>
-              <a:rPr lang="en-US" sz="4800" b="1" dirty="0" smtClean="0">
+              <a:rPr lang="en-US" sz="4000" b="1" dirty="0">
                 <a:solidFill>
                   <a:srgbClr val="660033"/>
                 </a:solidFill>
+                <a:latin typeface="+mn-lt"/>
               </a:rPr>
-              <a:t>( 4 )</a:t>
-            </a:r>
-            <a:endParaRPr lang="vi-VN" sz="4800" b="1" dirty="0">
+              <a:t>( 4 / 4 )</a:t>
+            </a:r>
+            <a:endParaRPr lang="vi-VN" sz="4000" b="1" dirty="0">
               <a:solidFill>
                 <a:srgbClr val="660033"/>
               </a:solidFill>
+              <a:latin typeface="+mn-lt"/>
             </a:endParaRPr>
           </a:p>
         </p:txBody>
@@ -4512,20 +4460,13 @@
     </p:spTree>
     <p:extLst>
       <p:ext uri="{BB962C8B-B14F-4D97-AF65-F5344CB8AC3E}">
-        <p14:creationId xmlns:p14="http://schemas.microsoft.com/office/powerpoint/2010/main" xmlns="" val="399046055"/>
+        <p14:creationId xmlns:p14="http://schemas.microsoft.com/office/powerpoint/2010/main" val="399046055"/>
       </p:ext>
     </p:extLst>
   </p:cSld>
   <p:clrMapOvr>
     <a:masterClrMapping/>
   </p:clrMapOvr>
-  <p:timing>
-    <p:tnLst>
-      <p:par>
-        <p:cTn id="1" dur="indefinite" restart="never" nodeType="tmRoot"/>
-      </p:par>
-    </p:tnLst>
-  </p:timing>
 </p:sld>
 </file>
 
@@ -4572,7 +4513,7 @@
               <a:buNone/>
             </a:pPr>
             <a:r>
-              <a:rPr lang="zh-TW" altLang="en-US" sz="6400" b="1" dirty="0" smtClean="0">
+              <a:rPr lang="zh-TW" altLang="en-US" sz="6400" b="1" dirty="0">
                 <a:solidFill>
                   <a:srgbClr val="660033"/>
                 </a:solidFill>
@@ -4588,7 +4529,7 @@
               <a:buNone/>
             </a:pPr>
             <a:r>
-              <a:rPr lang="zh-TW" altLang="en-US" sz="6400" b="1" dirty="0" smtClean="0">
+              <a:rPr lang="zh-TW" altLang="en-US" sz="6400" b="1" dirty="0">
                 <a:solidFill>
                   <a:srgbClr val="660033"/>
                 </a:solidFill>
@@ -4617,7 +4558,7 @@
         <p:spPr>
           <a:xfrm>
             <a:off x="0" y="5238763"/>
-            <a:ext cx="12192000" cy="861775"/>
+            <a:ext cx="12192000" cy="738660"/>
           </a:xfrm>
           <a:prstGeom prst="rect">
             <a:avLst/>
@@ -4632,17 +4573,19 @@
           <a:p>
             <a:pPr algn="ctr"/>
             <a:r>
-              <a:rPr lang="en-US" sz="4800" b="1" dirty="0" smtClean="0">
+              <a:rPr lang="en-US" sz="4000" b="1" dirty="0">
                 <a:solidFill>
                   <a:srgbClr val="660033"/>
                 </a:solidFill>
+                <a:latin typeface="+mn-lt"/>
               </a:rPr>
-              <a:t>( 4 )</a:t>
-            </a:r>
-            <a:endParaRPr lang="vi-VN" sz="4800" b="1" dirty="0">
+              <a:t>( 4 / 4 )</a:t>
+            </a:r>
+            <a:endParaRPr lang="vi-VN" sz="4000" b="1" dirty="0">
               <a:solidFill>
                 <a:srgbClr val="660033"/>
               </a:solidFill>
+              <a:latin typeface="+mn-lt"/>
             </a:endParaRPr>
           </a:p>
         </p:txBody>
@@ -4650,20 +4593,13 @@
     </p:spTree>
     <p:extLst>
       <p:ext uri="{BB962C8B-B14F-4D97-AF65-F5344CB8AC3E}">
-        <p14:creationId xmlns:p14="http://schemas.microsoft.com/office/powerpoint/2010/main" xmlns="" val="399046055"/>
+        <p14:creationId xmlns:p14="http://schemas.microsoft.com/office/powerpoint/2010/main" val="399046055"/>
       </p:ext>
     </p:extLst>
   </p:cSld>
   <p:clrMapOvr>
     <a:masterClrMapping/>
   </p:clrMapOvr>
-  <p:timing>
-    <p:tnLst>
-      <p:par>
-        <p:cTn id="1" dur="indefinite" restart="never" nodeType="tmRoot"/>
-      </p:par>
-    </p:tnLst>
-  </p:timing>
 </p:sld>
 </file>
 
@@ -4710,7 +4646,7 @@
               <a:buNone/>
             </a:pPr>
             <a:r>
-              <a:rPr lang="zh-TW" altLang="en-US" sz="6400" b="1" dirty="0" smtClean="0">
+              <a:rPr lang="zh-TW" altLang="en-US" sz="6400" b="1" dirty="0">
                 <a:solidFill>
                   <a:srgbClr val="660033"/>
                 </a:solidFill>
@@ -4726,7 +4662,7 @@
               <a:buNone/>
             </a:pPr>
             <a:r>
-              <a:rPr lang="zh-TW" altLang="en-US" sz="6400" b="1" dirty="0" smtClean="0">
+              <a:rPr lang="zh-TW" altLang="en-US" sz="6400" b="1" dirty="0">
                 <a:solidFill>
                   <a:srgbClr val="660033"/>
                 </a:solidFill>
@@ -4737,7 +4673,7 @@
               <a:t>速</a:t>
             </a:r>
             <a:r>
-              <a:rPr lang="zh-CN" altLang="en-US" sz="6400" b="1" dirty="0" smtClean="0">
+              <a:rPr lang="zh-CN" altLang="en-US" sz="6400" b="1" dirty="0">
                 <a:solidFill>
                   <a:srgbClr val="660033"/>
                 </a:solidFill>
@@ -4748,7 +4684,7 @@
               <a:t>照</a:t>
             </a:r>
             <a:r>
-              <a:rPr lang="zh-TW" altLang="en-US" sz="6400" b="1" dirty="0" smtClean="0">
+              <a:rPr lang="zh-TW" altLang="en-US" sz="6400" b="1" dirty="0">
                 <a:solidFill>
                   <a:srgbClr val="660033"/>
                 </a:solidFill>
@@ -4764,20 +4700,13 @@
     </p:spTree>
     <p:extLst>
       <p:ext uri="{BB962C8B-B14F-4D97-AF65-F5344CB8AC3E}">
-        <p14:creationId xmlns:p14="http://schemas.microsoft.com/office/powerpoint/2010/main" xmlns="" val="399046055"/>
+        <p14:creationId xmlns:p14="http://schemas.microsoft.com/office/powerpoint/2010/main" val="399046055"/>
       </p:ext>
     </p:extLst>
   </p:cSld>
   <p:clrMapOvr>
     <a:masterClrMapping/>
   </p:clrMapOvr>
-  <p:timing>
-    <p:tnLst>
-      <p:par>
-        <p:cTn id="1" dur="indefinite" restart="never" nodeType="tmRoot"/>
-      </p:par>
-    </p:tnLst>
-  </p:timing>
 </p:sld>
 </file>
 
@@ -4824,7 +4753,7 @@
               <a:buNone/>
             </a:pPr>
             <a:r>
-              <a:rPr lang="zh-TW" altLang="en-US" sz="6400" b="1" dirty="0" smtClean="0">
+              <a:rPr lang="zh-TW" altLang="en-US" sz="6400" b="1" dirty="0">
                 <a:solidFill>
                   <a:srgbClr val="660033"/>
                 </a:solidFill>
@@ -4840,7 +4769,7 @@
               <a:buNone/>
             </a:pPr>
             <a:r>
-              <a:rPr lang="zh-TW" altLang="en-US" sz="6400" b="1" dirty="0" smtClean="0">
+              <a:rPr lang="zh-TW" altLang="en-US" sz="6400" b="1" dirty="0">
                 <a:solidFill>
                   <a:srgbClr val="660033"/>
                 </a:solidFill>
@@ -4856,20 +4785,13 @@
     </p:spTree>
     <p:extLst>
       <p:ext uri="{BB962C8B-B14F-4D97-AF65-F5344CB8AC3E}">
-        <p14:creationId xmlns:p14="http://schemas.microsoft.com/office/powerpoint/2010/main" xmlns="" val="399046055"/>
+        <p14:creationId xmlns:p14="http://schemas.microsoft.com/office/powerpoint/2010/main" val="399046055"/>
       </p:ext>
     </p:extLst>
   </p:cSld>
   <p:clrMapOvr>
     <a:masterClrMapping/>
   </p:clrMapOvr>
-  <p:timing>
-    <p:tnLst>
-      <p:par>
-        <p:cTn id="1" dur="indefinite" restart="never" nodeType="tmRoot"/>
-      </p:par>
-    </p:tnLst>
-  </p:timing>
 </p:sld>
 </file>
 
@@ -4916,7 +4838,7 @@
               <a:buNone/>
             </a:pPr>
             <a:r>
-              <a:rPr lang="zh-TW" altLang="en-US" sz="6400" b="1" dirty="0" smtClean="0">
+              <a:rPr lang="zh-TW" altLang="en-US" sz="6400" b="1" dirty="0">
                 <a:solidFill>
                   <a:srgbClr val="660033"/>
                 </a:solidFill>
@@ -4931,7 +4853,7 @@
               <a:buNone/>
             </a:pPr>
             <a:r>
-              <a:rPr lang="zh-TW" altLang="en-US" sz="6400" b="1" dirty="0" smtClean="0">
+              <a:rPr lang="zh-TW" altLang="en-US" sz="6400" b="1" dirty="0">
                 <a:solidFill>
                   <a:srgbClr val="660033"/>
                 </a:solidFill>
@@ -4940,7 +4862,7 @@
               </a:rPr>
               <a:t>速發光  速發光</a:t>
             </a:r>
-            <a:endParaRPr lang="en-US" altLang="zh-TW" sz="6400" b="1" dirty="0" smtClean="0">
+            <a:endParaRPr lang="en-US" altLang="zh-TW" sz="6400" b="1" dirty="0">
               <a:solidFill>
                 <a:srgbClr val="660033"/>
               </a:solidFill>
@@ -4959,7 +4881,7 @@
         <p:spPr>
           <a:xfrm>
             <a:off x="0" y="5238763"/>
-            <a:ext cx="12192000" cy="861775"/>
+            <a:ext cx="12192000" cy="738660"/>
           </a:xfrm>
           <a:prstGeom prst="rect">
             <a:avLst/>
@@ -4974,17 +4896,19 @@
           <a:p>
             <a:pPr algn="ctr"/>
             <a:r>
-              <a:rPr lang="en-US" sz="4800" b="1" dirty="0" smtClean="0">
+              <a:rPr lang="en-US" sz="4000" b="1" dirty="0">
                 <a:solidFill>
                   <a:srgbClr val="660033"/>
                 </a:solidFill>
+                <a:latin typeface="+mn-lt"/>
               </a:rPr>
-              <a:t>( 1 )</a:t>
-            </a:r>
-            <a:endParaRPr lang="vi-VN" sz="4800" b="1" dirty="0">
+              <a:t>( 1 / 4 )</a:t>
+            </a:r>
+            <a:endParaRPr lang="vi-VN" sz="4000" b="1" dirty="0">
               <a:solidFill>
                 <a:srgbClr val="660033"/>
               </a:solidFill>
+              <a:latin typeface="+mn-lt"/>
             </a:endParaRPr>
           </a:p>
         </p:txBody>
@@ -4992,20 +4916,13 @@
     </p:spTree>
     <p:extLst>
       <p:ext uri="{BB962C8B-B14F-4D97-AF65-F5344CB8AC3E}">
-        <p14:creationId xmlns:p14="http://schemas.microsoft.com/office/powerpoint/2010/main" xmlns="" val="399046055"/>
+        <p14:creationId xmlns:p14="http://schemas.microsoft.com/office/powerpoint/2010/main" val="399046055"/>
       </p:ext>
     </p:extLst>
   </p:cSld>
   <p:clrMapOvr>
     <a:masterClrMapping/>
   </p:clrMapOvr>
-  <p:timing>
-    <p:tnLst>
-      <p:par>
-        <p:cTn id="1" dur="indefinite" restart="never" nodeType="tmRoot"/>
-      </p:par>
-    </p:tnLst>
-  </p:timing>
 </p:sld>
 </file>
 
@@ -5052,7 +4969,7 @@
               <a:buNone/>
             </a:pPr>
             <a:r>
-              <a:rPr lang="zh-TW" altLang="en-US" sz="6400" b="1" dirty="0" smtClean="0">
+              <a:rPr lang="zh-TW" altLang="en-US" sz="6400" b="1" dirty="0">
                 <a:solidFill>
                   <a:srgbClr val="660033"/>
                 </a:solidFill>
@@ -5062,7 +4979,7 @@
               </a:rPr>
               <a:t>彼哀呼求救豈可旁觀立待</a:t>
             </a:r>
-            <a:endParaRPr lang="zh-TW" altLang="en-US" sz="6400" b="1" dirty="0" smtClean="0">
+            <a:endParaRPr lang="zh-TW" altLang="en-US" sz="6400" b="1" dirty="0">
               <a:solidFill>
                 <a:srgbClr val="660033"/>
               </a:solidFill>
@@ -5075,7 +4992,7 @@
               <a:buNone/>
             </a:pPr>
             <a:r>
-              <a:rPr lang="zh-TW" altLang="en-US" sz="6400" b="1" dirty="0" smtClean="0">
+              <a:rPr lang="zh-TW" altLang="en-US" sz="6400" b="1" dirty="0">
                 <a:solidFill>
                   <a:srgbClr val="660033"/>
                 </a:solidFill>
@@ -5085,7 +5002,7 @@
               </a:rPr>
               <a:t>速發光  須速發光</a:t>
             </a:r>
-            <a:endParaRPr lang="zh-TW" altLang="en-US" sz="6400" b="1" dirty="0" smtClean="0">
+            <a:endParaRPr lang="zh-TW" altLang="en-US" sz="6400" b="1" dirty="0">
               <a:solidFill>
                 <a:srgbClr val="660033"/>
               </a:solidFill>
@@ -5104,7 +5021,7 @@
         <p:spPr>
           <a:xfrm>
             <a:off x="0" y="5238763"/>
-            <a:ext cx="12192000" cy="861775"/>
+            <a:ext cx="12192000" cy="738660"/>
           </a:xfrm>
           <a:prstGeom prst="rect">
             <a:avLst/>
@@ -5119,17 +5036,19 @@
           <a:p>
             <a:pPr algn="ctr"/>
             <a:r>
-              <a:rPr lang="en-US" sz="4800" b="1" dirty="0" smtClean="0">
+              <a:rPr lang="en-US" sz="4000" b="1" dirty="0">
                 <a:solidFill>
                   <a:srgbClr val="660033"/>
                 </a:solidFill>
+                <a:latin typeface="+mn-lt"/>
               </a:rPr>
-              <a:t>( 1 )</a:t>
-            </a:r>
-            <a:endParaRPr lang="vi-VN" sz="4800" b="1" dirty="0">
+              <a:t>( 1 / 4 )</a:t>
+            </a:r>
+            <a:endParaRPr lang="vi-VN" sz="4000" b="1" dirty="0">
               <a:solidFill>
                 <a:srgbClr val="660033"/>
               </a:solidFill>
+              <a:latin typeface="+mn-lt"/>
             </a:endParaRPr>
           </a:p>
         </p:txBody>
@@ -5137,20 +5056,13 @@
     </p:spTree>
     <p:extLst>
       <p:ext uri="{BB962C8B-B14F-4D97-AF65-F5344CB8AC3E}">
-        <p14:creationId xmlns:p14="http://schemas.microsoft.com/office/powerpoint/2010/main" xmlns="" val="399046055"/>
+        <p14:creationId xmlns:p14="http://schemas.microsoft.com/office/powerpoint/2010/main" val="399046055"/>
       </p:ext>
     </p:extLst>
   </p:cSld>
   <p:clrMapOvr>
     <a:masterClrMapping/>
   </p:clrMapOvr>
-  <p:timing>
-    <p:tnLst>
-      <p:par>
-        <p:cTn id="1" dur="indefinite" restart="never" nodeType="tmRoot"/>
-      </p:par>
-    </p:tnLst>
-  </p:timing>
 </p:sld>
 </file>
 
@@ -5197,7 +5109,7 @@
               <a:buNone/>
             </a:pPr>
             <a:r>
-              <a:rPr lang="zh-TW" altLang="en-US" sz="6400" b="1" dirty="0" smtClean="0">
+              <a:rPr lang="zh-TW" altLang="en-US" sz="6400" b="1" dirty="0">
                 <a:solidFill>
                   <a:srgbClr val="660033"/>
                 </a:solidFill>
@@ -5213,7 +5125,7 @@
               <a:buNone/>
             </a:pPr>
             <a:r>
-              <a:rPr lang="zh-TW" altLang="en-US" sz="6400" b="1" dirty="0" smtClean="0">
+              <a:rPr lang="zh-TW" altLang="en-US" sz="6400" b="1" dirty="0">
                 <a:solidFill>
                   <a:srgbClr val="660033"/>
                 </a:solidFill>
@@ -5224,7 +5136,7 @@
               <a:t>速</a:t>
             </a:r>
             <a:r>
-              <a:rPr lang="zh-CN" altLang="en-US" sz="6400" b="1" dirty="0" smtClean="0">
+              <a:rPr lang="zh-CN" altLang="en-US" sz="6400" b="1" dirty="0">
                 <a:solidFill>
                   <a:srgbClr val="660033"/>
                 </a:solidFill>
@@ -5235,7 +5147,7 @@
               <a:t>照</a:t>
             </a:r>
             <a:r>
-              <a:rPr lang="zh-TW" altLang="en-US" sz="6400" b="1" dirty="0" smtClean="0">
+              <a:rPr lang="zh-TW" altLang="en-US" sz="6400" b="1" dirty="0">
                 <a:solidFill>
                   <a:srgbClr val="660033"/>
                 </a:solidFill>
@@ -5251,20 +5163,13 @@
     </p:spTree>
     <p:extLst>
       <p:ext uri="{BB962C8B-B14F-4D97-AF65-F5344CB8AC3E}">
-        <p14:creationId xmlns:p14="http://schemas.microsoft.com/office/powerpoint/2010/main" xmlns="" val="399046055"/>
+        <p14:creationId xmlns:p14="http://schemas.microsoft.com/office/powerpoint/2010/main" val="399046055"/>
       </p:ext>
     </p:extLst>
   </p:cSld>
   <p:clrMapOvr>
     <a:masterClrMapping/>
   </p:clrMapOvr>
-  <p:timing>
-    <p:tnLst>
-      <p:par>
-        <p:cTn id="1" dur="indefinite" restart="never" nodeType="tmRoot"/>
-      </p:par>
-    </p:tnLst>
-  </p:timing>
 </p:sld>
 </file>
 
@@ -5311,7 +5216,7 @@
               <a:buNone/>
             </a:pPr>
             <a:r>
-              <a:rPr lang="zh-TW" altLang="en-US" sz="6400" b="1" dirty="0" smtClean="0">
+              <a:rPr lang="zh-TW" altLang="en-US" sz="6400" b="1" dirty="0">
                 <a:solidFill>
                   <a:srgbClr val="660033"/>
                 </a:solidFill>
@@ -5327,7 +5232,7 @@
               <a:buNone/>
             </a:pPr>
             <a:r>
-              <a:rPr lang="zh-TW" altLang="en-US" sz="6400" b="1" dirty="0" smtClean="0">
+              <a:rPr lang="zh-TW" altLang="en-US" sz="6400" b="1" dirty="0">
                 <a:solidFill>
                   <a:srgbClr val="660033"/>
                 </a:solidFill>
@@ -5343,20 +5248,13 @@
     </p:spTree>
     <p:extLst>
       <p:ext uri="{BB962C8B-B14F-4D97-AF65-F5344CB8AC3E}">
-        <p14:creationId xmlns:p14="http://schemas.microsoft.com/office/powerpoint/2010/main" xmlns="" val="399046055"/>
+        <p14:creationId xmlns:p14="http://schemas.microsoft.com/office/powerpoint/2010/main" val="399046055"/>
       </p:ext>
     </p:extLst>
   </p:cSld>
   <p:clrMapOvr>
     <a:masterClrMapping/>
   </p:clrMapOvr>
-  <p:timing>
-    <p:tnLst>
-      <p:par>
-        <p:cTn id="1" dur="indefinite" restart="never" nodeType="tmRoot"/>
-      </p:par>
-    </p:tnLst>
-  </p:timing>
 </p:sld>
 </file>
 
@@ -5403,7 +5301,7 @@
               <a:buNone/>
             </a:pPr>
             <a:r>
-              <a:rPr lang="zh-TW" altLang="en-US" sz="6400" b="1" dirty="0" smtClean="0">
+              <a:rPr lang="zh-TW" altLang="en-US" sz="6400" b="1" dirty="0">
                 <a:solidFill>
                   <a:srgbClr val="660033"/>
                 </a:solidFill>
@@ -5418,7 +5316,7 @@
               <a:buNone/>
             </a:pPr>
             <a:r>
-              <a:rPr lang="zh-TW" altLang="en-US" sz="6400" b="1" dirty="0" smtClean="0">
+              <a:rPr lang="zh-TW" altLang="en-US" sz="6400" b="1" dirty="0">
                 <a:solidFill>
                   <a:srgbClr val="660033"/>
                 </a:solidFill>
@@ -5446,7 +5344,7 @@
         <p:spPr>
           <a:xfrm>
             <a:off x="0" y="5238763"/>
-            <a:ext cx="12192000" cy="861775"/>
+            <a:ext cx="12192000" cy="738660"/>
           </a:xfrm>
           <a:prstGeom prst="rect">
             <a:avLst/>
@@ -5461,17 +5359,19 @@
           <a:p>
             <a:pPr algn="ctr"/>
             <a:r>
-              <a:rPr lang="en-US" sz="4800" b="1" dirty="0" smtClean="0">
+              <a:rPr lang="en-US" sz="4000" b="1" dirty="0">
                 <a:solidFill>
                   <a:srgbClr val="660033"/>
                 </a:solidFill>
+                <a:latin typeface="+mn-lt"/>
               </a:rPr>
-              <a:t>( 2 )</a:t>
-            </a:r>
-            <a:endParaRPr lang="vi-VN" sz="4800" b="1" dirty="0">
+              <a:t>( 2 / 4 )</a:t>
+            </a:r>
+            <a:endParaRPr lang="vi-VN" sz="4000" b="1" dirty="0">
               <a:solidFill>
                 <a:srgbClr val="660033"/>
               </a:solidFill>
+              <a:latin typeface="+mn-lt"/>
             </a:endParaRPr>
           </a:p>
         </p:txBody>
@@ -5479,20 +5379,13 @@
     </p:spTree>
     <p:extLst>
       <p:ext uri="{BB962C8B-B14F-4D97-AF65-F5344CB8AC3E}">
-        <p14:creationId xmlns:p14="http://schemas.microsoft.com/office/powerpoint/2010/main" xmlns="" val="399046055"/>
+        <p14:creationId xmlns:p14="http://schemas.microsoft.com/office/powerpoint/2010/main" val="399046055"/>
       </p:ext>
     </p:extLst>
   </p:cSld>
   <p:clrMapOvr>
     <a:masterClrMapping/>
   </p:clrMapOvr>
-  <p:timing>
-    <p:tnLst>
-      <p:par>
-        <p:cTn id="1" dur="indefinite" restart="never" nodeType="tmRoot"/>
-      </p:par>
-    </p:tnLst>
-  </p:timing>
 </p:sld>
 </file>
 
@@ -5539,7 +5432,7 @@
               <a:buNone/>
             </a:pPr>
             <a:r>
-              <a:rPr lang="zh-TW" altLang="en-US" sz="6400" b="1" dirty="0" smtClean="0">
+              <a:rPr lang="zh-TW" altLang="en-US" sz="6400" b="1" dirty="0">
                 <a:solidFill>
                   <a:srgbClr val="660033"/>
                 </a:solidFill>
@@ -5555,7 +5448,7 @@
               <a:buNone/>
             </a:pPr>
             <a:r>
-              <a:rPr lang="zh-TW" altLang="en-US" sz="6400" b="1" dirty="0" smtClean="0">
+              <a:rPr lang="zh-TW" altLang="en-US" sz="6400" b="1" dirty="0">
                 <a:solidFill>
                   <a:srgbClr val="660033"/>
                 </a:solidFill>
@@ -5565,14 +5458,6 @@
               </a:rPr>
               <a:t>速發光  須速發光</a:t>
             </a:r>
-            <a:endParaRPr lang="zh-TW" altLang="en-US" sz="6400" b="1" dirty="0">
-              <a:solidFill>
-                <a:srgbClr val="660033"/>
-              </a:solidFill>
-              <a:latin typeface="Microsoft JhengHei" panose="020B0604030504040204" pitchFamily="34" charset="-120"/>
-              <a:ea typeface="Microsoft JhengHei" panose="020B0604030504040204" pitchFamily="34" charset="-120"/>
-              <a:sym typeface="+mn-ea"/>
-            </a:endParaRPr>
           </a:p>
         </p:txBody>
       </p:sp>
@@ -5585,7 +5470,7 @@
         <p:spPr>
           <a:xfrm>
             <a:off x="0" y="5238763"/>
-            <a:ext cx="12192000" cy="861775"/>
+            <a:ext cx="12192000" cy="738660"/>
           </a:xfrm>
           <a:prstGeom prst="rect">
             <a:avLst/>
@@ -5600,17 +5485,19 @@
           <a:p>
             <a:pPr algn="ctr"/>
             <a:r>
-              <a:rPr lang="en-US" sz="4800" b="1" dirty="0" smtClean="0">
+              <a:rPr lang="en-US" sz="4000" b="1" dirty="0">
                 <a:solidFill>
                   <a:srgbClr val="660033"/>
                 </a:solidFill>
+                <a:latin typeface="+mn-lt"/>
               </a:rPr>
-              <a:t>( 2 )</a:t>
-            </a:r>
-            <a:endParaRPr lang="vi-VN" sz="4800" b="1" dirty="0">
+              <a:t>( 2 / 4 )</a:t>
+            </a:r>
+            <a:endParaRPr lang="vi-VN" sz="4000" b="1" dirty="0">
               <a:solidFill>
                 <a:srgbClr val="660033"/>
               </a:solidFill>
+              <a:latin typeface="+mn-lt"/>
             </a:endParaRPr>
           </a:p>
         </p:txBody>
@@ -5618,20 +5505,13 @@
     </p:spTree>
     <p:extLst>
       <p:ext uri="{BB962C8B-B14F-4D97-AF65-F5344CB8AC3E}">
-        <p14:creationId xmlns:p14="http://schemas.microsoft.com/office/powerpoint/2010/main" xmlns="" val="399046055"/>
+        <p14:creationId xmlns:p14="http://schemas.microsoft.com/office/powerpoint/2010/main" val="399046055"/>
       </p:ext>
     </p:extLst>
   </p:cSld>
   <p:clrMapOvr>
     <a:masterClrMapping/>
   </p:clrMapOvr>
-  <p:timing>
-    <p:tnLst>
-      <p:par>
-        <p:cTn id="1" dur="indefinite" restart="never" nodeType="tmRoot"/>
-      </p:par>
-    </p:tnLst>
-  </p:timing>
 </p:sld>
 </file>
 
@@ -5678,7 +5558,7 @@
               <a:buNone/>
             </a:pPr>
             <a:r>
-              <a:rPr lang="zh-TW" altLang="en-US" sz="6400" b="1" dirty="0" smtClean="0">
+              <a:rPr lang="zh-TW" altLang="en-US" sz="6400" b="1" dirty="0">
                 <a:solidFill>
                   <a:srgbClr val="660033"/>
                 </a:solidFill>
@@ -5694,7 +5574,7 @@
               <a:buNone/>
             </a:pPr>
             <a:r>
-              <a:rPr lang="zh-TW" altLang="en-US" sz="6400" b="1" dirty="0" smtClean="0">
+              <a:rPr lang="zh-TW" altLang="en-US" sz="6400" b="1" dirty="0">
                 <a:solidFill>
                   <a:srgbClr val="660033"/>
                 </a:solidFill>
@@ -5705,7 +5585,7 @@
               <a:t>速</a:t>
             </a:r>
             <a:r>
-              <a:rPr lang="zh-CN" altLang="en-US" sz="6400" b="1" dirty="0" smtClean="0">
+              <a:rPr lang="zh-CN" altLang="en-US" sz="6400" b="1" dirty="0">
                 <a:solidFill>
                   <a:srgbClr val="660033"/>
                 </a:solidFill>
@@ -5716,7 +5596,7 @@
               <a:t>照</a:t>
             </a:r>
             <a:r>
-              <a:rPr lang="zh-TW" altLang="en-US" sz="6400" b="1" dirty="0" smtClean="0">
+              <a:rPr lang="zh-TW" altLang="en-US" sz="6400" b="1" dirty="0">
                 <a:solidFill>
                   <a:srgbClr val="660033"/>
                 </a:solidFill>
@@ -5732,20 +5612,13 @@
     </p:spTree>
     <p:extLst>
       <p:ext uri="{BB962C8B-B14F-4D97-AF65-F5344CB8AC3E}">
-        <p14:creationId xmlns:p14="http://schemas.microsoft.com/office/powerpoint/2010/main" xmlns="" val="399046055"/>
+        <p14:creationId xmlns:p14="http://schemas.microsoft.com/office/powerpoint/2010/main" val="399046055"/>
       </p:ext>
     </p:extLst>
   </p:cSld>
   <p:clrMapOvr>
     <a:masterClrMapping/>
   </p:clrMapOvr>
-  <p:timing>
-    <p:tnLst>
-      <p:par>
-        <p:cTn id="1" dur="indefinite" restart="never" nodeType="tmRoot"/>
-      </p:par>
-    </p:tnLst>
-  </p:timing>
 </p:sld>
 </file>
 
@@ -5792,7 +5665,7 @@
               <a:buNone/>
             </a:pPr>
             <a:r>
-              <a:rPr lang="zh-TW" altLang="en-US" sz="6400" b="1" dirty="0" smtClean="0">
+              <a:rPr lang="zh-TW" altLang="en-US" sz="6400" b="1" dirty="0">
                 <a:solidFill>
                   <a:srgbClr val="660033"/>
                 </a:solidFill>
@@ -5808,7 +5681,7 @@
               <a:buNone/>
             </a:pPr>
             <a:r>
-              <a:rPr lang="zh-TW" altLang="en-US" sz="6400" b="1" dirty="0" smtClean="0">
+              <a:rPr lang="zh-TW" altLang="en-US" sz="6400" b="1" dirty="0">
                 <a:solidFill>
                   <a:srgbClr val="660033"/>
                 </a:solidFill>
@@ -5824,20 +5697,13 @@
     </p:spTree>
     <p:extLst>
       <p:ext uri="{BB962C8B-B14F-4D97-AF65-F5344CB8AC3E}">
-        <p14:creationId xmlns:p14="http://schemas.microsoft.com/office/powerpoint/2010/main" xmlns="" val="399046055"/>
+        <p14:creationId xmlns:p14="http://schemas.microsoft.com/office/powerpoint/2010/main" val="399046055"/>
       </p:ext>
     </p:extLst>
   </p:cSld>
   <p:clrMapOvr>
     <a:masterClrMapping/>
   </p:clrMapOvr>
-  <p:timing>
-    <p:tnLst>
-      <p:par>
-        <p:cTn id="1" dur="indefinite" restart="never" nodeType="tmRoot"/>
-      </p:par>
-    </p:tnLst>
-  </p:timing>
 </p:sld>
 </file>
 
@@ -6123,7 +5989,7 @@
   <a:extraClrSchemeLst/>
   <a:extLst>
     <a:ext uri="{05A4C25C-085E-4340-85A3-A5531E510DB2}">
-      <thm15:themeFamily xmlns:thm15="http://schemas.microsoft.com/office/thememl/2012/main" xmlns="" name="Theme1" id="{1A8DE197-990E-4893-BF04-3823FBB50F9A}" vid="{430B7048-5A04-4BDB-939A-C7E865DB887B}"/>
+      <thm15:themeFamily xmlns:thm15="http://schemas.microsoft.com/office/thememl/2012/main" name="Theme1" id="{1A8DE197-990E-4893-BF04-3823FBB50F9A}" vid="{430B7048-5A04-4BDB-939A-C7E865DB887B}"/>
     </a:ext>
   </a:extLst>
 </a:theme>
@@ -6411,7 +6277,7 @@
   <a:extraClrSchemeLst/>
   <a:extLst>
     <a:ext uri="{05A4C25C-085E-4340-85A3-A5531E510DB2}">
-      <thm15:themeFamily xmlns:thm15="http://schemas.microsoft.com/office/thememl/2012/main" xmlns="" name="Office Theme" id="{62F939B6-93AF-4DB8-9C6B-D6C7DFDC589F}" vid="{4A3C46E8-61CC-4603-A589-7422A47A8E4A}"/>
+      <thm15:themeFamily xmlns:thm15="http://schemas.microsoft.com/office/thememl/2012/main" name="Office Theme" id="{62F939B6-93AF-4DB8-9C6B-D6C7DFDC589F}" vid="{4A3C46E8-61CC-4603-A589-7422A47A8E4A}"/>
     </a:ext>
   </a:extLst>
 </a:theme>
@@ -6672,7 +6538,7 @@
   <a:extraClrSchemeLst/>
   <a:extLst>
     <a:ext uri="{05A4C25C-085E-4340-85A3-A5531E510DB2}">
-      <thm15:themeFamily xmlns:thm15="http://schemas.microsoft.com/office/thememl/2012/main" xmlns="" name="Office Theme" id="{62F939B6-93AF-4DB8-9C6B-D6C7DFDC589F}" vid="{4A3C46E8-61CC-4603-A589-7422A47A8E4A}"/>
+      <thm15:themeFamily xmlns:thm15="http://schemas.microsoft.com/office/thememl/2012/main" name="Office Theme" id="{62F939B6-93AF-4DB8-9C6B-D6C7DFDC589F}" vid="{4A3C46E8-61CC-4603-A589-7422A47A8E4A}"/>
     </a:ext>
   </a:extLst>
 </a:theme>
